--- a/문제해결프로그래밍_숙제/숙제5. 이진탐색 알고리즘.pptx
+++ b/문제해결프로그래밍_숙제/숙제5. 이진탐색 알고리즘.pptx
@@ -5,7 +5,7 @@
     <p:sldMasterId id="2147483684" r:id="rId1"/>
   </p:sldMasterIdLst>
   <p:notesMasterIdLst>
-    <p:notesMasterId r:id="rId12"/>
+    <p:notesMasterId r:id="rId14"/>
   </p:notesMasterIdLst>
   <p:sldIdLst>
     <p:sldId id="258" r:id="rId2"/>
@@ -18,6 +18,8 @@
     <p:sldId id="341" r:id="rId9"/>
     <p:sldId id="342" r:id="rId10"/>
     <p:sldId id="343" r:id="rId11"/>
+    <p:sldId id="344" r:id="rId12"/>
+    <p:sldId id="345" r:id="rId13"/>
   </p:sldIdLst>
   <p:sldSz cx="9144000" cy="6858000" type="screen4x3"/>
   <p:notesSz cx="6796088" cy="9926638"/>
@@ -277,7 +279,7 @@
               <a:pPr>
                 <a:defRPr/>
               </a:pPr>
-              <a:t>2026-04-16</a:t>
+              <a:t>2026-04-27</a:t>
             </a:fld>
             <a:endParaRPr lang="ko-KR" altLang="en-US"/>
           </a:p>
@@ -977,6 +979,210 @@
     <p:extLst>
       <p:ext uri="{BB962C8B-B14F-4D97-AF65-F5344CB8AC3E}">
         <p14:creationId xmlns:p14="http://schemas.microsoft.com/office/powerpoint/2010/main" val="1957181314"/>
+      </p:ext>
+    </p:extLst>
+  </p:cSld>
+  <p:clrMapOvr>
+    <a:masterClrMapping/>
+  </p:clrMapOvr>
+</p:notes>
+</file>
+
+<file path=ppt/notesSlides/notesSlide11.xml><?xml version="1.0" encoding="utf-8"?>
+<p:notes xmlns:a="http://schemas.openxmlformats.org/drawingml/2006/main" xmlns:r="http://schemas.openxmlformats.org/officeDocument/2006/relationships" xmlns:p="http://schemas.openxmlformats.org/presentationml/2006/main">
+  <p:cSld>
+    <p:spTree>
+      <p:nvGrpSpPr>
+        <p:cNvPr id="1" name=""/>
+        <p:cNvGrpSpPr/>
+        <p:nvPr/>
+      </p:nvGrpSpPr>
+      <p:grpSpPr>
+        <a:xfrm>
+          <a:off x="0" y="0"/>
+          <a:ext cx="0" cy="0"/>
+          <a:chOff x="0" y="0"/>
+          <a:chExt cx="0" cy="0"/>
+        </a:xfrm>
+      </p:grpSpPr>
+      <p:sp>
+        <p:nvSpPr>
+          <p:cNvPr id="2" name="슬라이드 이미지 개체 틀 1"/>
+          <p:cNvSpPr>
+            <a:spLocks noGrp="1" noRot="1" noChangeAspect="1"/>
+          </p:cNvSpPr>
+          <p:nvPr>
+            <p:ph type="sldImg"/>
+          </p:nvPr>
+        </p:nvSpPr>
+        <p:spPr/>
+      </p:sp>
+      <p:sp>
+        <p:nvSpPr>
+          <p:cNvPr id="3" name="슬라이드 노트 개체 틀 2"/>
+          <p:cNvSpPr>
+            <a:spLocks noGrp="1"/>
+          </p:cNvSpPr>
+          <p:nvPr>
+            <p:ph type="body" idx="1"/>
+          </p:nvPr>
+        </p:nvSpPr>
+        <p:spPr/>
+        <p:txBody>
+          <a:bodyPr/>
+          <a:lstStyle/>
+          <a:p>
+            <a:endParaRPr lang="ko-KR" altLang="en-US"/>
+          </a:p>
+        </p:txBody>
+      </p:sp>
+      <p:sp>
+        <p:nvSpPr>
+          <p:cNvPr id="4" name="슬라이드 번호 개체 틀 3"/>
+          <p:cNvSpPr>
+            <a:spLocks noGrp="1"/>
+          </p:cNvSpPr>
+          <p:nvPr>
+            <p:ph type="sldNum" sz="quarter" idx="10"/>
+          </p:nvPr>
+        </p:nvSpPr>
+        <p:spPr/>
+        <p:txBody>
+          <a:bodyPr/>
+          <a:lstStyle/>
+          <a:p>
+            <a:pPr>
+              <a:defRPr/>
+            </a:pPr>
+            <a:fld id="{F8CEB46D-9B0E-47D1-8684-1DB50B81E07A}" type="slidenum">
+              <a:rPr lang="ko-KR" altLang="en-US" smtClean="0"/>
+              <a:pPr>
+                <a:defRPr/>
+              </a:pPr>
+              <a:t>11</a:t>
+            </a:fld>
+            <a:endParaRPr lang="ko-KR" altLang="en-US"/>
+          </a:p>
+        </p:txBody>
+      </p:sp>
+    </p:spTree>
+    <p:extLst>
+      <p:ext uri="{BB962C8B-B14F-4D97-AF65-F5344CB8AC3E}">
+        <p14:creationId xmlns:p14="http://schemas.microsoft.com/office/powerpoint/2010/main" val="1230207811"/>
+      </p:ext>
+    </p:extLst>
+  </p:cSld>
+  <p:clrMapOvr>
+    <a:masterClrMapping/>
+  </p:clrMapOvr>
+</p:notes>
+</file>
+
+<file path=ppt/notesSlides/notesSlide12.xml><?xml version="1.0" encoding="utf-8"?>
+<p:notes xmlns:a="http://schemas.openxmlformats.org/drawingml/2006/main" xmlns:r="http://schemas.openxmlformats.org/officeDocument/2006/relationships" xmlns:p="http://schemas.openxmlformats.org/presentationml/2006/main">
+  <p:cSld>
+    <p:spTree>
+      <p:nvGrpSpPr>
+        <p:cNvPr id="1" name="">
+          <a:extLst>
+            <a:ext uri="{FF2B5EF4-FFF2-40B4-BE49-F238E27FC236}">
+              <a16:creationId xmlns:a16="http://schemas.microsoft.com/office/drawing/2014/main" id="{C248637D-675F-5E32-690D-2281BE8B8157}"/>
+            </a:ext>
+          </a:extLst>
+        </p:cNvPr>
+        <p:cNvGrpSpPr/>
+        <p:nvPr/>
+      </p:nvGrpSpPr>
+      <p:grpSpPr>
+        <a:xfrm>
+          <a:off x="0" y="0"/>
+          <a:ext cx="0" cy="0"/>
+          <a:chOff x="0" y="0"/>
+          <a:chExt cx="0" cy="0"/>
+        </a:xfrm>
+      </p:grpSpPr>
+      <p:sp>
+        <p:nvSpPr>
+          <p:cNvPr id="2" name="슬라이드 이미지 개체 틀 1">
+            <a:extLst>
+              <a:ext uri="{FF2B5EF4-FFF2-40B4-BE49-F238E27FC236}">
+                <a16:creationId xmlns:a16="http://schemas.microsoft.com/office/drawing/2014/main" id="{42C354D7-5F9A-CAAF-D089-3BD4E3E507A9}"/>
+              </a:ext>
+            </a:extLst>
+          </p:cNvPr>
+          <p:cNvSpPr>
+            <a:spLocks noGrp="1" noRot="1" noChangeAspect="1"/>
+          </p:cNvSpPr>
+          <p:nvPr>
+            <p:ph type="sldImg"/>
+          </p:nvPr>
+        </p:nvSpPr>
+        <p:spPr/>
+      </p:sp>
+      <p:sp>
+        <p:nvSpPr>
+          <p:cNvPr id="3" name="슬라이드 노트 개체 틀 2">
+            <a:extLst>
+              <a:ext uri="{FF2B5EF4-FFF2-40B4-BE49-F238E27FC236}">
+                <a16:creationId xmlns:a16="http://schemas.microsoft.com/office/drawing/2014/main" id="{0748C64C-D027-757A-464D-693B0467B3AC}"/>
+              </a:ext>
+            </a:extLst>
+          </p:cNvPr>
+          <p:cNvSpPr>
+            <a:spLocks noGrp="1"/>
+          </p:cNvSpPr>
+          <p:nvPr>
+            <p:ph type="body" idx="1"/>
+          </p:nvPr>
+        </p:nvSpPr>
+        <p:spPr/>
+        <p:txBody>
+          <a:bodyPr/>
+          <a:lstStyle/>
+          <a:p>
+            <a:endParaRPr lang="ko-KR" altLang="en-US"/>
+          </a:p>
+        </p:txBody>
+      </p:sp>
+      <p:sp>
+        <p:nvSpPr>
+          <p:cNvPr id="4" name="슬라이드 번호 개체 틀 3">
+            <a:extLst>
+              <a:ext uri="{FF2B5EF4-FFF2-40B4-BE49-F238E27FC236}">
+                <a16:creationId xmlns:a16="http://schemas.microsoft.com/office/drawing/2014/main" id="{2D2D41C9-60F7-A235-5B84-DBC200EF3F4B}"/>
+              </a:ext>
+            </a:extLst>
+          </p:cNvPr>
+          <p:cNvSpPr>
+            <a:spLocks noGrp="1"/>
+          </p:cNvSpPr>
+          <p:nvPr>
+            <p:ph type="sldNum" sz="quarter" idx="10"/>
+          </p:nvPr>
+        </p:nvSpPr>
+        <p:spPr/>
+        <p:txBody>
+          <a:bodyPr/>
+          <a:lstStyle/>
+          <a:p>
+            <a:pPr>
+              <a:defRPr/>
+            </a:pPr>
+            <a:fld id="{F8CEB46D-9B0E-47D1-8684-1DB50B81E07A}" type="slidenum">
+              <a:rPr lang="ko-KR" altLang="en-US" smtClean="0"/>
+              <a:pPr>
+                <a:defRPr/>
+              </a:pPr>
+              <a:t>12</a:t>
+            </a:fld>
+            <a:endParaRPr lang="ko-KR" altLang="en-US"/>
+          </a:p>
+        </p:txBody>
+      </p:sp>
+    </p:spTree>
+    <p:extLst>
+      <p:ext uri="{BB962C8B-B14F-4D97-AF65-F5344CB8AC3E}">
+        <p14:creationId xmlns:p14="http://schemas.microsoft.com/office/powerpoint/2010/main" val="2067109125"/>
       </p:ext>
     </p:extLst>
   </p:cSld>
@@ -7015,19 +7221,19 @@
               <a:t>어두운 굴다리</a:t>
             </a:r>
             <a:r>
-              <a:rPr lang="en-US" altLang="ko-KR" sz="3200" dirty="0" smtClean="0"/>
+              <a:rPr lang="en-US" altLang="ko-KR" sz="3200" dirty="0"/>
               <a:t>(</a:t>
             </a:r>
             <a:r>
-              <a:rPr lang="en-US" altLang="ko-KR" sz="3200" dirty="0" err="1" smtClean="0"/>
+              <a:rPr lang="en-US" altLang="ko-KR" sz="3200" dirty="0" err="1"/>
               <a:t>TUKorea</a:t>
             </a:r>
             <a:r>
-              <a:rPr lang="en-US" altLang="ko-KR" sz="3200" dirty="0" smtClean="0"/>
+              <a:rPr lang="en-US" altLang="ko-KR" sz="3200" dirty="0"/>
               <a:t>, </a:t>
             </a:r>
             <a:r>
-              <a:rPr lang="ko-KR" altLang="en-US" sz="3200" dirty="0" smtClean="0"/>
+              <a:rPr lang="ko-KR" altLang="en-US" sz="3200" dirty="0"/>
               <a:t>백준</a:t>
             </a:r>
             <a:r>
@@ -7046,20 +7252,12 @@
               <a:rPr lang="en-US" altLang="ko-KR" sz="3200" dirty="0"/>
             </a:br>
             <a:r>
-              <a:rPr lang="en-US" altLang="ko-KR" sz="2000" dirty="0" smtClean="0">
+              <a:rPr lang="en-US" altLang="ko-KR" sz="2000" dirty="0">
                 <a:solidFill>
                   <a:srgbClr val="0000FF"/>
                 </a:solidFill>
               </a:rPr>
-              <a:t>http</a:t>
-            </a:r>
-            <a:r>
-              <a:rPr lang="en-US" altLang="ko-KR" sz="2000" dirty="0">
-                <a:solidFill>
-                  <a:srgbClr val="0000FF"/>
-                </a:solidFill>
-              </a:rPr>
-              <a:t>://210.93.60.51/problem/0180</a:t>
+              <a:t>http://210.93.60.51/problem/0180</a:t>
             </a:r>
             <a:br>
               <a:rPr lang="en-US" altLang="ko-KR" sz="2000" dirty="0">
@@ -7069,28 +7267,12 @@
               </a:rPr>
             </a:br>
             <a:r>
-              <a:rPr lang="en-US" altLang="ko-KR" sz="2000" dirty="0" smtClean="0">
+              <a:rPr lang="en-US" altLang="ko-KR" sz="2000" dirty="0">
                 <a:solidFill>
                   <a:srgbClr val="0000FF"/>
                 </a:solidFill>
               </a:rPr>
-              <a:t>https</a:t>
-            </a:r>
-            <a:r>
-              <a:rPr lang="en-US" altLang="ko-KR" sz="2000" dirty="0">
-                <a:solidFill>
-                  <a:srgbClr val="0000FF"/>
-                </a:solidFill>
-              </a:rPr>
-              <a:t>://www.acmicpc.net/problem/17266</a:t>
-            </a:r>
-            <a:r>
-              <a:rPr lang="en-US" altLang="ko-KR" sz="1600" dirty="0">
-                <a:solidFill>
-                  <a:srgbClr val="0000FF"/>
-                </a:solidFill>
-              </a:rPr>
-              <a:t/>
+              <a:t>https://www.acmicpc.net/problem/17266</a:t>
             </a:r>
             <a:br>
               <a:rPr lang="en-US" altLang="ko-KR" sz="1600" dirty="0">
@@ -7377,6 +7559,768 @@
 </p:sld>
 </file>
 
+<file path=ppt/slides/slide11.xml><?xml version="1.0" encoding="utf-8"?>
+<p:sld xmlns:a="http://schemas.openxmlformats.org/drawingml/2006/main" xmlns:r="http://schemas.openxmlformats.org/officeDocument/2006/relationships" xmlns:p="http://schemas.openxmlformats.org/presentationml/2006/main">
+  <p:cSld>
+    <p:spTree>
+      <p:nvGrpSpPr>
+        <p:cNvPr id="1" name=""/>
+        <p:cNvGrpSpPr/>
+        <p:nvPr/>
+      </p:nvGrpSpPr>
+      <p:grpSpPr>
+        <a:xfrm>
+          <a:off x="0" y="0"/>
+          <a:ext cx="0" cy="0"/>
+          <a:chOff x="0" y="0"/>
+          <a:chExt cx="0" cy="0"/>
+        </a:xfrm>
+      </p:grpSpPr>
+      <p:sp>
+        <p:nvSpPr>
+          <p:cNvPr id="2" name="제목 1"/>
+          <p:cNvSpPr>
+            <a:spLocks noGrp="1"/>
+          </p:cNvSpPr>
+          <p:nvPr>
+            <p:ph type="title"/>
+          </p:nvPr>
+        </p:nvSpPr>
+        <p:spPr/>
+        <p:txBody>
+          <a:bodyPr/>
+          <a:lstStyle/>
+          <a:p>
+            <a:r>
+              <a:rPr lang="en-US" altLang="ko-KR" sz="2800" dirty="0">
+                <a:ea typeface="맑은 고딕"/>
+              </a:rPr>
+              <a:t>6. </a:t>
+            </a:r>
+            <a:r>
+              <a:rPr lang="ko-KR" altLang="en-US" sz="2800" dirty="0">
+                <a:ea typeface="맑은 고딕"/>
+              </a:rPr>
+              <a:t>공유기 설치 </a:t>
+            </a:r>
+            <a:r>
+              <a:rPr lang="en-US" altLang="ko-KR" sz="2800" dirty="0">
+                <a:ea typeface="맑은 고딕"/>
+              </a:rPr>
+              <a:t>(</a:t>
+            </a:r>
+            <a:r>
+              <a:rPr lang="ko-KR" altLang="en-US" sz="2800" dirty="0">
+                <a:ea typeface="맑은 고딕"/>
+              </a:rPr>
+              <a:t>이분탐색</a:t>
+            </a:r>
+            <a:r>
+              <a:rPr lang="en-US" altLang="ko-KR" sz="2800" dirty="0">
+                <a:ea typeface="맑은 고딕"/>
+              </a:rPr>
+              <a:t>)</a:t>
+            </a:r>
+            <a:br>
+              <a:rPr lang="en-US" altLang="ko-KR" sz="2800" dirty="0"/>
+            </a:br>
+            <a:r>
+              <a:rPr lang="en-US" altLang="ko-KR" sz="2000" dirty="0">
+                <a:solidFill>
+                  <a:srgbClr val="0000FF"/>
+                </a:solidFill>
+                <a:ea typeface="맑은 고딕"/>
+              </a:rPr>
+              <a:t>http://210.93.60.51/problem/0259</a:t>
+            </a:r>
+            <a:br>
+              <a:rPr lang="en-US" altLang="ko-KR" sz="2000" dirty="0">
+                <a:solidFill>
+                  <a:srgbClr val="0000FF"/>
+                </a:solidFill>
+                <a:ea typeface="맑은 고딕"/>
+              </a:rPr>
+            </a:br>
+            <a:r>
+              <a:rPr lang="en-US" altLang="ko-KR" sz="2000" dirty="0">
+                <a:solidFill>
+                  <a:srgbClr val="0000FF"/>
+                </a:solidFill>
+                <a:ea typeface="맑은 고딕"/>
+              </a:rPr>
+              <a:t>https://www.acmicpc.net/problem/2110</a:t>
+            </a:r>
+          </a:p>
+        </p:txBody>
+      </p:sp>
+      <p:sp>
+        <p:nvSpPr>
+          <p:cNvPr id="3" name="내용 개체 틀 2"/>
+          <p:cNvSpPr>
+            <a:spLocks noGrp="1"/>
+          </p:cNvSpPr>
+          <p:nvPr>
+            <p:ph idx="1"/>
+          </p:nvPr>
+        </p:nvSpPr>
+        <p:spPr>
+          <a:xfrm>
+            <a:off x="457200" y="1340768"/>
+            <a:ext cx="8363272" cy="4785395"/>
+          </a:xfrm>
+        </p:spPr>
+        <p:txBody>
+          <a:bodyPr/>
+          <a:lstStyle/>
+          <a:p>
+            <a:r>
+              <a:rPr lang="ko-KR" altLang="en-US" sz="2000" dirty="0"/>
+              <a:t>집 </a:t>
+            </a:r>
+            <a:r>
+              <a:rPr lang="en-US" altLang="ko-KR" sz="2000" dirty="0"/>
+              <a:t>N</a:t>
+            </a:r>
+            <a:r>
+              <a:rPr lang="ko-KR" altLang="en-US" sz="2000" dirty="0"/>
+              <a:t>개가 수직선 위에 있다</a:t>
+            </a:r>
+            <a:r>
+              <a:rPr lang="en-US" altLang="ko-KR" sz="2000" dirty="0"/>
+              <a:t>. </a:t>
+            </a:r>
+            <a:r>
+              <a:rPr lang="ko-KR" altLang="en-US" sz="2000" dirty="0"/>
+              <a:t>각각의 집의 좌표는 </a:t>
+            </a:r>
+            <a:r>
+              <a:rPr lang="en-US" altLang="ko-KR" sz="2000" dirty="0"/>
+              <a:t>x1, ..., </a:t>
+            </a:r>
+            <a:r>
+              <a:rPr lang="en-US" altLang="ko-KR" sz="2000" dirty="0" err="1"/>
+              <a:t>xN</a:t>
+            </a:r>
+            <a:r>
+              <a:rPr lang="ko-KR" altLang="en-US" sz="2000" dirty="0"/>
+              <a:t>이고</a:t>
+            </a:r>
+            <a:r>
+              <a:rPr lang="en-US" altLang="ko-KR" sz="2000" dirty="0"/>
+              <a:t>, </a:t>
+            </a:r>
+            <a:r>
+              <a:rPr lang="ko-KR" altLang="en-US" sz="2000" dirty="0"/>
+              <a:t>집 </a:t>
+            </a:r>
+            <a:r>
+              <a:rPr lang="ko-KR" altLang="en-US" sz="2000" dirty="0" err="1"/>
+              <a:t>여러개가</a:t>
+            </a:r>
+            <a:r>
+              <a:rPr lang="ko-KR" altLang="en-US" sz="2000" dirty="0"/>
+              <a:t> 같은 좌표를 가지는 일은 없다</a:t>
+            </a:r>
+            <a:r>
+              <a:rPr lang="en-US" altLang="ko-KR" sz="2000" dirty="0"/>
+              <a:t>.</a:t>
+            </a:r>
+          </a:p>
+          <a:p>
+            <a:endParaRPr lang="en-US" altLang="ko-KR" sz="2000" dirty="0"/>
+          </a:p>
+          <a:p>
+            <a:r>
+              <a:rPr lang="ko-KR" altLang="en-US" sz="2000" dirty="0"/>
+              <a:t>공유기 </a:t>
+            </a:r>
+            <a:r>
+              <a:rPr lang="en-US" altLang="ko-KR" sz="2000" dirty="0"/>
+              <a:t>C</a:t>
+            </a:r>
+            <a:r>
+              <a:rPr lang="ko-KR" altLang="en-US" sz="2000" dirty="0"/>
+              <a:t>개를 설치하려고 한다</a:t>
+            </a:r>
+            <a:r>
+              <a:rPr lang="en-US" altLang="ko-KR" sz="2000" dirty="0"/>
+              <a:t>. </a:t>
+            </a:r>
+            <a:r>
+              <a:rPr lang="ko-KR" altLang="en-US" sz="2000" dirty="0"/>
+              <a:t>한 집에는 공유기를 하나만 설치</a:t>
+            </a:r>
+            <a:r>
+              <a:rPr lang="en-US" altLang="ko-KR" sz="2000" dirty="0"/>
+              <a:t> </a:t>
+            </a:r>
+          </a:p>
+          <a:p>
+            <a:endParaRPr lang="en-US" altLang="ko-KR" sz="2000" dirty="0"/>
+          </a:p>
+          <a:p>
+            <a:r>
+              <a:rPr lang="en-US" altLang="ko-KR" sz="2000" b="1" dirty="0"/>
+              <a:t>C</a:t>
+            </a:r>
+            <a:r>
+              <a:rPr lang="ko-KR" altLang="en-US" sz="2000" b="1" dirty="0"/>
+              <a:t>개의 공유기를 </a:t>
+            </a:r>
+            <a:r>
+              <a:rPr lang="en-US" altLang="ko-KR" sz="2000" b="1" dirty="0"/>
+              <a:t>N</a:t>
+            </a:r>
+            <a:r>
+              <a:rPr lang="ko-KR" altLang="en-US" sz="2000" b="1" dirty="0"/>
+              <a:t>개의 집에 적당히 설치해서</a:t>
+            </a:r>
+            <a:r>
+              <a:rPr lang="en-US" altLang="ko-KR" sz="2000" b="1" dirty="0"/>
+              <a:t>, </a:t>
+            </a:r>
+            <a:r>
+              <a:rPr lang="ko-KR" altLang="en-US" sz="2000" b="1" dirty="0"/>
+              <a:t>가장 인접한 두 공유기 사이의 거리를 최대로 하는 프로그램을 작성하시오</a:t>
+            </a:r>
+            <a:r>
+              <a:rPr lang="en-US" altLang="ko-KR" sz="2000" b="1" dirty="0"/>
+              <a:t>.</a:t>
+            </a:r>
+          </a:p>
+          <a:p>
+            <a:endParaRPr lang="en-US" altLang="ko-KR" sz="2000" dirty="0"/>
+          </a:p>
+          <a:p>
+            <a:r>
+              <a:rPr lang="ko-KR" altLang="en-US" sz="2000" dirty="0"/>
+              <a:t>첫째 줄에 </a:t>
+            </a:r>
+            <a:r>
+              <a:rPr lang="ko-KR" altLang="en-US" sz="2000" b="1" dirty="0"/>
+              <a:t>집의 개수 </a:t>
+            </a:r>
+            <a:r>
+              <a:rPr lang="en-US" altLang="ko-KR" sz="2000" b="1" dirty="0"/>
+              <a:t>N (2 ≤ N ≤ 200,000)</a:t>
+            </a:r>
+            <a:r>
+              <a:rPr lang="ko-KR" altLang="en-US" sz="2000" dirty="0"/>
+              <a:t>과 </a:t>
+            </a:r>
+            <a:r>
+              <a:rPr lang="ko-KR" altLang="en-US" sz="2000" b="1" dirty="0"/>
+              <a:t>공유기의 개수 </a:t>
+            </a:r>
+            <a:r>
+              <a:rPr lang="en-US" altLang="ko-KR" sz="2000" b="1" dirty="0"/>
+              <a:t>C (2 ≤ C ≤ N)</a:t>
+            </a:r>
+            <a:r>
+              <a:rPr lang="ko-KR" altLang="en-US" sz="2000" dirty="0"/>
+              <a:t>이 하나 이상의 빈 칸을 사이에 두고 주어진다</a:t>
+            </a:r>
+            <a:r>
+              <a:rPr lang="en-US" altLang="ko-KR" sz="2000" dirty="0"/>
+              <a:t>. </a:t>
+            </a:r>
+          </a:p>
+          <a:p>
+            <a:r>
+              <a:rPr lang="ko-KR" altLang="en-US" sz="2000" dirty="0"/>
+              <a:t>둘째 줄부터 </a:t>
+            </a:r>
+            <a:r>
+              <a:rPr lang="en-US" altLang="ko-KR" sz="2000" dirty="0"/>
+              <a:t>N</a:t>
+            </a:r>
+            <a:r>
+              <a:rPr lang="ko-KR" altLang="en-US" sz="2000" dirty="0"/>
+              <a:t>개의 줄에는 </a:t>
+            </a:r>
+            <a:r>
+              <a:rPr lang="ko-KR" altLang="en-US" sz="2000" b="1" dirty="0"/>
+              <a:t>집의 좌표 </a:t>
+            </a:r>
+            <a:r>
+              <a:rPr lang="en-US" altLang="ko-KR" sz="2000" b="1" dirty="0"/>
+              <a:t>xi (0 ≤ xi ≤ 1,000,000,000)</a:t>
+            </a:r>
+          </a:p>
+          <a:p>
+            <a:endParaRPr lang="en-US" altLang="ko-KR" sz="2000" dirty="0"/>
+          </a:p>
+          <a:p>
+            <a:r>
+              <a:rPr lang="ko-KR" altLang="en-US" sz="2000" b="1" dirty="0">
+                <a:solidFill>
+                  <a:srgbClr val="FF0000"/>
+                </a:solidFill>
+              </a:rPr>
+              <a:t>공유기가 모든 집을 커버하는 하는 것 아님</a:t>
+            </a:r>
+            <a:endParaRPr lang="en-US" altLang="ko-KR" sz="2000" b="1" dirty="0">
+              <a:solidFill>
+                <a:srgbClr val="FF0000"/>
+              </a:solidFill>
+            </a:endParaRPr>
+          </a:p>
+          <a:p>
+            <a:r>
+              <a:rPr lang="en-US" altLang="ko-KR" sz="2000" b="1" dirty="0">
+                <a:solidFill>
+                  <a:srgbClr val="FF0000"/>
+                </a:solidFill>
+              </a:rPr>
+              <a:t>C</a:t>
+            </a:r>
+            <a:r>
+              <a:rPr lang="ko-KR" altLang="en-US" sz="2000" b="1" dirty="0">
+                <a:solidFill>
+                  <a:srgbClr val="FF0000"/>
+                </a:solidFill>
+              </a:rPr>
+              <a:t>개 공유기를 다 설치할 수 있는가</a:t>
+            </a:r>
+            <a:r>
+              <a:rPr lang="en-US" altLang="ko-KR" sz="2000" b="1" dirty="0">
+                <a:solidFill>
+                  <a:srgbClr val="FF0000"/>
+                </a:solidFill>
+              </a:rPr>
+              <a:t>?</a:t>
+            </a:r>
+          </a:p>
+        </p:txBody>
+      </p:sp>
+      <p:sp>
+        <p:nvSpPr>
+          <p:cNvPr id="5" name="슬라이드 번호 개체 틀 4">
+            <a:extLst>
+              <a:ext uri="{FF2B5EF4-FFF2-40B4-BE49-F238E27FC236}">
+                <a16:creationId xmlns:a16="http://schemas.microsoft.com/office/drawing/2014/main" id="{93415DAC-B125-B7C1-4D98-E7D689F9C728}"/>
+              </a:ext>
+            </a:extLst>
+          </p:cNvPr>
+          <p:cNvSpPr>
+            <a:spLocks noGrp="1"/>
+          </p:cNvSpPr>
+          <p:nvPr>
+            <p:ph type="sldNum" sz="quarter" idx="12"/>
+          </p:nvPr>
+        </p:nvSpPr>
+        <p:spPr/>
+        <p:txBody>
+          <a:bodyPr/>
+          <a:lstStyle/>
+          <a:p>
+            <a:pPr>
+              <a:defRPr/>
+            </a:pPr>
+            <a:fld id="{A268DA64-E15D-4814-A1DA-86D92D550423}" type="slidenum">
+              <a:rPr lang="ko-KR" altLang="en-US"/>
+              <a:pPr>
+                <a:defRPr/>
+              </a:pPr>
+              <a:t>11</a:t>
+            </a:fld>
+            <a:endParaRPr lang="ko-KR" altLang="en-US"/>
+          </a:p>
+        </p:txBody>
+      </p:sp>
+    </p:spTree>
+    <p:extLst>
+      <p:ext uri="{BB962C8B-B14F-4D97-AF65-F5344CB8AC3E}">
+        <p14:creationId xmlns:p14="http://schemas.microsoft.com/office/powerpoint/2010/main" val="1446457459"/>
+      </p:ext>
+    </p:extLst>
+  </p:cSld>
+  <p:clrMapOvr>
+    <a:masterClrMapping/>
+  </p:clrMapOvr>
+</p:sld>
+</file>
+
+<file path=ppt/slides/slide12.xml><?xml version="1.0" encoding="utf-8"?>
+<p:sld xmlns:a="http://schemas.openxmlformats.org/drawingml/2006/main" xmlns:r="http://schemas.openxmlformats.org/officeDocument/2006/relationships" xmlns:p="http://schemas.openxmlformats.org/presentationml/2006/main">
+  <p:cSld>
+    <p:spTree>
+      <p:nvGrpSpPr>
+        <p:cNvPr id="1" name="">
+          <a:extLst>
+            <a:ext uri="{FF2B5EF4-FFF2-40B4-BE49-F238E27FC236}">
+              <a16:creationId xmlns:a16="http://schemas.microsoft.com/office/drawing/2014/main" id="{D3D7F08C-91EF-051A-AB9F-2B47FC8203D7}"/>
+            </a:ext>
+          </a:extLst>
+        </p:cNvPr>
+        <p:cNvGrpSpPr/>
+        <p:nvPr/>
+      </p:nvGrpSpPr>
+      <p:grpSpPr>
+        <a:xfrm>
+          <a:off x="0" y="0"/>
+          <a:ext cx="0" cy="0"/>
+          <a:chOff x="0" y="0"/>
+          <a:chExt cx="0" cy="0"/>
+        </a:xfrm>
+      </p:grpSpPr>
+      <p:sp>
+        <p:nvSpPr>
+          <p:cNvPr id="2" name="제목 1">
+            <a:extLst>
+              <a:ext uri="{FF2B5EF4-FFF2-40B4-BE49-F238E27FC236}">
+                <a16:creationId xmlns:a16="http://schemas.microsoft.com/office/drawing/2014/main" id="{B5F9F781-F201-C003-C8C9-534B815D146E}"/>
+              </a:ext>
+            </a:extLst>
+          </p:cNvPr>
+          <p:cNvSpPr>
+            <a:spLocks noGrp="1"/>
+          </p:cNvSpPr>
+          <p:nvPr>
+            <p:ph type="title"/>
+          </p:nvPr>
+        </p:nvSpPr>
+        <p:spPr/>
+        <p:txBody>
+          <a:bodyPr/>
+          <a:lstStyle/>
+          <a:p>
+            <a:r>
+              <a:rPr lang="en-US" altLang="ko-KR" sz="2800" dirty="0">
+                <a:ea typeface="맑은 고딕"/>
+              </a:rPr>
+              <a:t>7. </a:t>
+            </a:r>
+            <a:r>
+              <a:rPr lang="ko-KR" altLang="en-US" sz="2800" dirty="0">
+                <a:ea typeface="맑은 고딕"/>
+              </a:rPr>
+              <a:t>예산 </a:t>
+            </a:r>
+            <a:r>
+              <a:rPr lang="en-US" altLang="ko-KR" sz="2800" dirty="0">
+                <a:ea typeface="맑은 고딕"/>
+              </a:rPr>
+              <a:t>(</a:t>
+            </a:r>
+            <a:r>
+              <a:rPr lang="ko-KR" altLang="en-US" sz="2800" dirty="0">
+                <a:ea typeface="맑은 고딕"/>
+              </a:rPr>
+              <a:t>이분탐색</a:t>
+            </a:r>
+            <a:r>
+              <a:rPr lang="en-US" altLang="ko-KR" sz="2800" dirty="0">
+                <a:ea typeface="맑은 고딕"/>
+              </a:rPr>
+              <a:t>)</a:t>
+            </a:r>
+            <a:br>
+              <a:rPr lang="en-US" altLang="ko-KR" sz="2800" dirty="0"/>
+            </a:br>
+            <a:r>
+              <a:rPr lang="en-US" altLang="ko-KR" sz="2000" dirty="0">
+                <a:solidFill>
+                  <a:srgbClr val="0000FF"/>
+                </a:solidFill>
+                <a:ea typeface="맑은 고딕"/>
+              </a:rPr>
+              <a:t>http://210.93.60.51/problem/0260</a:t>
+            </a:r>
+            <a:br>
+              <a:rPr lang="en-US" altLang="ko-KR" sz="2000" dirty="0">
+                <a:solidFill>
+                  <a:srgbClr val="0000FF"/>
+                </a:solidFill>
+                <a:ea typeface="맑은 고딕"/>
+              </a:rPr>
+            </a:br>
+            <a:r>
+              <a:rPr lang="en-US" altLang="ko-KR" sz="2000" dirty="0">
+                <a:solidFill>
+                  <a:srgbClr val="0000FF"/>
+                </a:solidFill>
+                <a:ea typeface="맑은 고딕"/>
+              </a:rPr>
+              <a:t>https://www.acmicpc.net/problem/2512</a:t>
+            </a:r>
+          </a:p>
+        </p:txBody>
+      </p:sp>
+      <p:sp>
+        <p:nvSpPr>
+          <p:cNvPr id="3" name="내용 개체 틀 2">
+            <a:extLst>
+              <a:ext uri="{FF2B5EF4-FFF2-40B4-BE49-F238E27FC236}">
+                <a16:creationId xmlns:a16="http://schemas.microsoft.com/office/drawing/2014/main" id="{6716C5B9-5616-A340-2F5A-42443FFAA5A8}"/>
+              </a:ext>
+            </a:extLst>
+          </p:cNvPr>
+          <p:cNvSpPr>
+            <a:spLocks noGrp="1"/>
+          </p:cNvSpPr>
+          <p:nvPr>
+            <p:ph idx="1"/>
+          </p:nvPr>
+        </p:nvSpPr>
+        <p:spPr>
+          <a:xfrm>
+            <a:off x="457200" y="1340768"/>
+            <a:ext cx="8363272" cy="4785395"/>
+          </a:xfrm>
+        </p:spPr>
+        <p:txBody>
+          <a:bodyPr/>
+          <a:lstStyle/>
+          <a:p>
+            <a:r>
+              <a:rPr lang="ko-KR" altLang="en-US" sz="2000" dirty="0"/>
+              <a:t>정해진 총액 이하에서 가능한 한 </a:t>
+            </a:r>
+            <a:r>
+              <a:rPr lang="ko-KR" altLang="en-US" sz="2000" b="1" dirty="0"/>
+              <a:t>최대의 총 예산</a:t>
+            </a:r>
+            <a:r>
+              <a:rPr lang="ko-KR" altLang="en-US" sz="2000" dirty="0"/>
+              <a:t>을 다음과 같은 방법으로 배정한다</a:t>
+            </a:r>
+            <a:r>
+              <a:rPr lang="en-US" altLang="ko-KR" sz="2000" dirty="0"/>
+              <a:t>.</a:t>
+            </a:r>
+          </a:p>
+          <a:p>
+            <a:endParaRPr lang="en-US" altLang="ko-KR" sz="2000" dirty="0"/>
+          </a:p>
+          <a:p>
+            <a:r>
+              <a:rPr lang="ko-KR" altLang="en-US" sz="1800" dirty="0"/>
+              <a:t>모든 요청이 배정될 수 있는 경우에는 요청한 금액을 그대로 배정한다</a:t>
+            </a:r>
+            <a:r>
+              <a:rPr lang="en-US" altLang="ko-KR" sz="1800" dirty="0"/>
+              <a:t>.</a:t>
+            </a:r>
+          </a:p>
+          <a:p>
+            <a:r>
+              <a:rPr lang="ko-KR" altLang="en-US" sz="1800" dirty="0"/>
+              <a:t>모든 요청이 배정될 수 없는 경우에는 특정한 </a:t>
+            </a:r>
+            <a:r>
+              <a:rPr lang="ko-KR" altLang="en-US" sz="1800" b="1" dirty="0"/>
+              <a:t>정수 상한액</a:t>
+            </a:r>
+            <a:r>
+              <a:rPr lang="ko-KR" altLang="en-US" sz="1800" dirty="0"/>
+              <a:t>을 계산하여 그 이상인 예산요청에는 모두 상한액을 배정한다</a:t>
+            </a:r>
+            <a:r>
+              <a:rPr lang="en-US" altLang="ko-KR" sz="1800" dirty="0"/>
+              <a:t>. </a:t>
+            </a:r>
+            <a:r>
+              <a:rPr lang="ko-KR" altLang="en-US" sz="1800" dirty="0" err="1"/>
+              <a:t>상한액</a:t>
+            </a:r>
+            <a:r>
+              <a:rPr lang="ko-KR" altLang="en-US" sz="1800" dirty="0"/>
+              <a:t> 이하의 예산요청에 대해서는 요청한 금액을 그대로 배정한다</a:t>
+            </a:r>
+            <a:r>
+              <a:rPr lang="en-US" altLang="ko-KR" sz="1800" dirty="0"/>
+              <a:t>. </a:t>
+            </a:r>
+          </a:p>
+          <a:p>
+            <a:endParaRPr lang="en-US" altLang="ko-KR" sz="1800" b="1" dirty="0">
+              <a:solidFill>
+                <a:srgbClr val="FF0000"/>
+              </a:solidFill>
+            </a:endParaRPr>
+          </a:p>
+          <a:p>
+            <a:r>
+              <a:rPr lang="ko-KR" altLang="en-US" sz="2000" dirty="0"/>
+              <a:t>첫째 줄에는 지방의 수 </a:t>
+            </a:r>
+            <a:r>
+              <a:rPr lang="en-US" altLang="ko-KR" sz="2000" dirty="0"/>
+              <a:t>N</a:t>
+            </a:r>
+            <a:r>
+              <a:rPr lang="ko-KR" altLang="en-US" sz="2000" dirty="0"/>
+              <a:t>이 주어진다</a:t>
+            </a:r>
+            <a:r>
+              <a:rPr lang="en-US" altLang="ko-KR" sz="2000" dirty="0"/>
+              <a:t>. N</a:t>
+            </a:r>
+            <a:r>
+              <a:rPr lang="ko-KR" altLang="en-US" sz="2000" dirty="0"/>
+              <a:t>은 </a:t>
+            </a:r>
+            <a:r>
+              <a:rPr lang="en-US" altLang="ko-KR" sz="2000" dirty="0"/>
+              <a:t>3 </a:t>
+            </a:r>
+            <a:r>
+              <a:rPr lang="ko-KR" altLang="en-US" sz="2000" dirty="0"/>
+              <a:t>이상 </a:t>
+            </a:r>
+            <a:r>
+              <a:rPr lang="en-US" altLang="ko-KR" sz="2000" dirty="0"/>
+              <a:t>10,000 </a:t>
+            </a:r>
+            <a:r>
+              <a:rPr lang="ko-KR" altLang="en-US" sz="2000" dirty="0"/>
+              <a:t>이하이다</a:t>
+            </a:r>
+            <a:r>
+              <a:rPr lang="en-US" altLang="ko-KR" sz="2000" dirty="0"/>
+              <a:t>. </a:t>
+            </a:r>
+          </a:p>
+          <a:p>
+            <a:r>
+              <a:rPr lang="ko-KR" altLang="en-US" sz="2000" dirty="0"/>
+              <a:t>다음 줄에는 각 지방의 예산요청 </a:t>
+            </a:r>
+            <a:r>
+              <a:rPr lang="en-US" altLang="ko-KR" sz="2000" dirty="0"/>
+              <a:t>N</a:t>
+            </a:r>
+            <a:r>
+              <a:rPr lang="ko-KR" altLang="en-US" sz="2000" dirty="0"/>
+              <a:t>개의 정수 </a:t>
+            </a:r>
+            <a:r>
+              <a:rPr lang="en-US" altLang="ko-KR" sz="2000" dirty="0"/>
+              <a:t>1 </a:t>
+            </a:r>
+            <a:r>
+              <a:rPr lang="ko-KR" altLang="en-US" sz="2000" dirty="0"/>
+              <a:t>이상 </a:t>
+            </a:r>
+            <a:r>
+              <a:rPr lang="en-US" altLang="ko-KR" sz="2000" dirty="0"/>
+              <a:t>100,000 </a:t>
+            </a:r>
+            <a:r>
+              <a:rPr lang="ko-KR" altLang="en-US" sz="2000" dirty="0"/>
+              <a:t>이하</a:t>
+            </a:r>
+            <a:endParaRPr lang="en-US" altLang="ko-KR" sz="2000" dirty="0"/>
+          </a:p>
+          <a:p>
+            <a:r>
+              <a:rPr lang="ko-KR" altLang="en-US" sz="2000" dirty="0"/>
+              <a:t>그 다음 줄에는 총 예산 </a:t>
+            </a:r>
+            <a:r>
+              <a:rPr lang="en-US" altLang="ko-KR" sz="2000" dirty="0"/>
+              <a:t>M. M</a:t>
+            </a:r>
+            <a:r>
+              <a:rPr lang="ko-KR" altLang="en-US" sz="2000" dirty="0"/>
+              <a:t>은 </a:t>
+            </a:r>
+            <a:r>
+              <a:rPr lang="en-US" altLang="ko-KR" sz="2000" dirty="0"/>
+              <a:t>N </a:t>
+            </a:r>
+            <a:r>
+              <a:rPr lang="ko-KR" altLang="en-US" sz="2000" dirty="0"/>
+              <a:t>이상 </a:t>
+            </a:r>
+            <a:r>
+              <a:rPr lang="en-US" altLang="ko-KR" sz="2000" dirty="0"/>
+              <a:t>1,000,000,000 </a:t>
+            </a:r>
+            <a:r>
+              <a:rPr lang="ko-KR" altLang="en-US" sz="2000" dirty="0"/>
+              <a:t>이하이다</a:t>
+            </a:r>
+            <a:r>
+              <a:rPr lang="en-US" altLang="ko-KR" sz="2000" dirty="0"/>
+              <a:t>. </a:t>
+            </a:r>
+          </a:p>
+          <a:p>
+            <a:pPr marL="0" indent="0">
+              <a:buNone/>
+            </a:pPr>
+            <a:endParaRPr lang="ko-KR" altLang="en-US" sz="2000" dirty="0"/>
+          </a:p>
+          <a:p>
+            <a:r>
+              <a:rPr lang="ko-KR" altLang="en-US" sz="2000" dirty="0"/>
+              <a:t>첫째 줄에는 </a:t>
+            </a:r>
+            <a:r>
+              <a:rPr lang="ko-KR" altLang="en-US" sz="2000" b="1" dirty="0"/>
+              <a:t>배정된 예산들 중 최댓값인 정수를 출력</a:t>
+            </a:r>
+            <a:r>
+              <a:rPr lang="ko-KR" altLang="en-US" sz="2000" dirty="0"/>
+              <a:t>한다</a:t>
+            </a:r>
+            <a:r>
+              <a:rPr lang="en-US" altLang="ko-KR" sz="2000" dirty="0"/>
+              <a:t>. </a:t>
+            </a:r>
+          </a:p>
+        </p:txBody>
+      </p:sp>
+      <p:sp>
+        <p:nvSpPr>
+          <p:cNvPr id="5" name="슬라이드 번호 개체 틀 4">
+            <a:extLst>
+              <a:ext uri="{FF2B5EF4-FFF2-40B4-BE49-F238E27FC236}">
+                <a16:creationId xmlns:a16="http://schemas.microsoft.com/office/drawing/2014/main" id="{9FD788ED-87C1-E636-93CE-C6D5F6D187BB}"/>
+              </a:ext>
+            </a:extLst>
+          </p:cNvPr>
+          <p:cNvSpPr>
+            <a:spLocks noGrp="1"/>
+          </p:cNvSpPr>
+          <p:nvPr>
+            <p:ph type="sldNum" sz="quarter" idx="12"/>
+          </p:nvPr>
+        </p:nvSpPr>
+        <p:spPr/>
+        <p:txBody>
+          <a:bodyPr/>
+          <a:lstStyle/>
+          <a:p>
+            <a:pPr>
+              <a:defRPr/>
+            </a:pPr>
+            <a:fld id="{A268DA64-E15D-4814-A1DA-86D92D550423}" type="slidenum">
+              <a:rPr lang="ko-KR" altLang="en-US"/>
+              <a:pPr>
+                <a:defRPr/>
+              </a:pPr>
+              <a:t>12</a:t>
+            </a:fld>
+            <a:endParaRPr lang="ko-KR" altLang="en-US"/>
+          </a:p>
+        </p:txBody>
+      </p:sp>
+    </p:spTree>
+    <p:extLst>
+      <p:ext uri="{BB962C8B-B14F-4D97-AF65-F5344CB8AC3E}">
+        <p14:creationId xmlns:p14="http://schemas.microsoft.com/office/powerpoint/2010/main" val="516517271"/>
+      </p:ext>
+    </p:extLst>
+  </p:cSld>
+  <p:clrMapOvr>
+    <a:masterClrMapping/>
+  </p:clrMapOvr>
+</p:sld>
+</file>
+
 <file path=ppt/slides/slide2.xml><?xml version="1.0" encoding="utf-8"?>
 <p:sld xmlns:a="http://schemas.openxmlformats.org/drawingml/2006/main" xmlns:r="http://schemas.openxmlformats.org/officeDocument/2006/relationships" xmlns:p="http://schemas.openxmlformats.org/presentationml/2006/main">
   <p:cSld>
@@ -7649,14 +8593,6 @@
                 </a:solidFill>
               </a:rPr>
               <a:t>백준 온라인저지</a:t>
-            </a:r>
-            <a:r>
-              <a:rPr lang="en-US" altLang="ko-KR" sz="2800" b="1" dirty="0">
-                <a:solidFill>
-                  <a:srgbClr val="0000FF"/>
-                </a:solidFill>
-              </a:rPr>
-              <a:t/>
             </a:r>
             <a:br>
               <a:rPr lang="en-US" altLang="ko-KR" sz="2800" b="1" dirty="0">
@@ -8160,14 +9096,6 @@
               </a:rPr>
               <a:t> 온라인저지</a:t>
             </a:r>
-            <a:r>
-              <a:rPr lang="en-US" altLang="ko-KR" sz="2800" b="1" dirty="0">
-                <a:solidFill>
-                  <a:srgbClr val="0000FF"/>
-                </a:solidFill>
-              </a:rPr>
-              <a:t/>
-            </a:r>
             <a:br>
               <a:rPr lang="en-US" altLang="ko-KR" sz="2800" b="1" dirty="0">
                 <a:solidFill>
@@ -9338,19 +10266,19 @@
               <a:t>사칙연산 </a:t>
             </a:r>
             <a:r>
-              <a:rPr lang="en-US" altLang="ko-KR" sz="3200" dirty="0" smtClean="0"/>
+              <a:rPr lang="en-US" altLang="ko-KR" sz="3200" dirty="0"/>
               <a:t>(</a:t>
             </a:r>
             <a:r>
-              <a:rPr lang="en-US" altLang="ko-KR" sz="3200" dirty="0" err="1" smtClean="0"/>
+              <a:rPr lang="en-US" altLang="ko-KR" sz="3200" dirty="0" err="1"/>
               <a:t>TUKorea</a:t>
             </a:r>
             <a:r>
-              <a:rPr lang="en-US" altLang="ko-KR" sz="3200" dirty="0" smtClean="0"/>
+              <a:rPr lang="en-US" altLang="ko-KR" sz="3200" dirty="0"/>
               <a:t>, </a:t>
             </a:r>
             <a:r>
-              <a:rPr lang="ko-KR" altLang="en-US" sz="3200" dirty="0" smtClean="0"/>
+              <a:rPr lang="ko-KR" altLang="en-US" sz="3200" dirty="0"/>
               <a:t>백준</a:t>
             </a:r>
             <a:r>
@@ -9374,23 +10302,7 @@
                   <a:srgbClr val="0000FF"/>
                 </a:solidFill>
               </a:rPr>
-              <a:t>http://</a:t>
-            </a:r>
-            <a:r>
-              <a:rPr lang="en-US" altLang="ko-KR" sz="2000" dirty="0" smtClean="0">
-                <a:solidFill>
-                  <a:srgbClr val="0000FF"/>
-                </a:solidFill>
-              </a:rPr>
-              <a:t>210.93.60.51/problem/0181</a:t>
-            </a:r>
-            <a:r>
-              <a:rPr lang="en-US" altLang="ko-KR" sz="2000" dirty="0">
-                <a:solidFill>
-                  <a:srgbClr val="0000FF"/>
-                </a:solidFill>
-              </a:rPr>
-              <a:t/>
+              <a:t>http://210.93.60.51/problem/0181</a:t>
             </a:r>
             <a:br>
               <a:rPr lang="en-US" altLang="ko-KR" sz="2000" dirty="0">
@@ -9405,15 +10317,7 @@
                   <a:srgbClr val="0000FF"/>
                 </a:solidFill>
               </a:rPr>
-              <a:t>https://</a:t>
-            </a:r>
-            <a:r>
-              <a:rPr lang="en-US" altLang="ko-KR" sz="2000" dirty="0" smtClean="0">
-                <a:solidFill>
-                  <a:srgbClr val="0000FF"/>
-                </a:solidFill>
-              </a:rPr>
-              <a:t>www.acmicpc.net/problem/13420</a:t>
+              <a:t>https://www.acmicpc.net/problem/13420</a:t>
             </a:r>
             <a:endParaRPr lang="ko-KR" altLang="en-US" sz="3200" dirty="0"/>
           </a:p>
